--- a/treinamento/oficina-nos-trilhos/1-slides-nos-trilhos.pptx
+++ b/treinamento/oficina-nos-trilhos/1-slides-nos-trilhos.pptx
@@ -145,14 +145,14 @@
   <p:extLst>
     <p:ext uri="{521415D9-36F7-43E2-AB2F-B90AF26B5E84}">
       <p14:sectionLst xmlns:p14="http://schemas.microsoft.com/office/powerpoint/2010/main">
-        <p14:section name="Abertura" id="{7d82fdd7-4328-2525-bc36-08d62b23bae3}">
+        <p14:section name="Abertura" id="{0f1eee33-1d9e-1284-d944-f94c3e0d43cb}">
           <p14:sldIdLst>
             <p14:sldId id="256"/>
             <p14:sldId id="257"/>
             <p14:sldId id="258"/>
           </p14:sldIdLst>
         </p14:section>
-        <p14:section name="1 · Por que versionar" id="{026c23da-b613-9a6c-8e1e-9d0c477cd70d}">
+        <p14:section name="1 · Por que versionar" id="{a9317fb6-166e-bcb0-c723-fb36636e09f1}">
           <p14:sldIdLst>
             <p14:sldId id="259"/>
             <p14:sldId id="260"/>
@@ -161,7 +161,7 @@
             <p14:sldId id="263"/>
           </p14:sldIdLst>
         </p14:section>
-        <p14:section name="2 · A malha ferroviária" id="{2f1688ed-84d4-35ad-67d2-79b216fa7a65}">
+        <p14:section name="2 · A malha ferroviária" id="{8936bf3c-7deb-60fa-dade-5ed06f33f1ac}">
           <p14:sldIdLst>
             <p14:sldId id="264"/>
             <p14:sldId id="265"/>
@@ -174,7 +174,7 @@
             <p14:sldId id="272"/>
           </p14:sldIdLst>
         </p14:section>
-        <p14:section name="3 · Os tipos de merge" id="{a71d1ecd-6ae7-eb89-a5c8-48f542094393}">
+        <p14:section name="3 · Os tipos de merge" id="{ca9306e9-1e0d-fb52-2ae2-011b27db420e}">
           <p14:sldIdLst>
             <p14:sldId id="273"/>
             <p14:sldId id="274"/>
@@ -189,7 +189,7 @@
             <p14:sldId id="283"/>
           </p14:sldIdLst>
         </p14:section>
-        <p14:section name="4 · A viagem no Modelo VIC" id="{35680c6f-6393-3a78-fea1-00c044c5fbad}">
+        <p14:section name="4 · A viagem no Modelo VIC" id="{d270aba3-2225-f75f-2417-8a341a7452b3}">
           <p14:sldIdLst>
             <p14:sldId id="284"/>
             <p14:sldId id="285"/>
@@ -200,7 +200,7 @@
             <p14:sldId id="290"/>
           </p14:sldIdLst>
         </p14:section>
-        <p14:section name="Fechamento" id="{d74e4ad6-3279-1502-5f0a-eb0db8655cf0}">
+        <p14:section name="Fechamento" id="{9b022b9c-0fdb-0b8f-7577-152aca066bbe}">
           <p14:sldIdLst>
             <p14:sldId id="291"/>
             <p14:sldId id="292"/>
@@ -700,7 +700,7 @@
           <a:p>
             <a:r>
               <a:rPr lang="en-US" dirty="0"/>
-              <a:t>Leia o desenho da esquerda para a direita. A linha azul é um trilho; cada bolinha é uma estação, um commit. Em B, sai um desvio: alguém foi trabalhar separado. F1 e F2 são as paradas desse trabalho. Em M, o desvio volta: isso é o merge. O tempo corre para a direita; C veio depois de tudo.</a:t>
+              <a:t>Leia o desenho da esquerda para a direita. A linha azul é um trilho; cada bolinha é uma estação, um commit. Em B, sai um desvio: alguém foi trabalhar separado. F1 e F2 são as paradas desse trabalho. Em M, o desvio volta: isso é o merge. O tempo corre para a direita; C veio depois de tudo. Feche com a frase de baixo: o trem, a composição, é a versão do produto, o que no contrato é o texto. É ele que se monta na develop, para na vistoria e entra em operação na main.</a:t>
             </a:r>
             <a:endParaRPr lang="en-US" dirty="0"/>
           </a:p>
@@ -6528,8 +6528,8 @@
         </p:blipFill>
         <p:spPr>
           <a:xfrm>
-            <a:off x="1463040" y="1325880"/>
-            <a:ext cx="9235440" cy="3034502"/>
+            <a:off x="1691640" y="1325880"/>
+            <a:ext cx="8778240" cy="2884279"/>
           </a:xfrm>
           <a:prstGeom prst="rect">
             <a:avLst/>
@@ -6539,6 +6539,53 @@
       <p:sp>
         <p:nvSpPr>
           <p:cNvPr id="5" name="Text 2"/>
+          <p:cNvSpPr txBox="1"/>
+          <p:nvPr/>
+        </p:nvSpPr>
+        <p:spPr>
+          <a:xfrm>
+            <a:off x="822960" y="4114800"/>
+            <a:ext cx="10515600" cy="548640"/>
+          </a:xfrm>
+          <a:prstGeom prst="rect">
+            <a:avLst/>
+          </a:prstGeom>
+          <a:noFill/>
+          <a:ln/>
+        </p:spPr>
+        <p:txBody>
+          <a:bodyPr wrap="square" lIns="0" tIns="0" rIns="0" bIns="0" rtlCol="0" anchor="ctr"/>
+          <a:lstStyle/>
+          <a:p>
+            <a:pPr algn="ctr" indent="0" marL="0">
+              <a:buNone/>
+            </a:pPr>
+            <a:r>
+              <a:rPr lang="en-US" sz="1400" b="1" dirty="0">
+                <a:solidFill>
+                  <a:schemeClr val="accent1"/>
+                </a:solidFill>
+              </a:rPr>
+              <a:t>E o trem? </a:t>
+            </a:r>
+            <a:pPr algn="ctr" indent="0" marL="0">
+              <a:buNone/>
+            </a:pPr>
+            <a:r>
+              <a:rPr lang="en-US" sz="1400" dirty="0">
+                <a:solidFill>
+                  <a:schemeClr val="tx1"/>
+                </a:solidFill>
+              </a:rPr>
+              <a:t>A composição é a versão do produto; no contrato, o texto. Os trilhos e as estações são o caminho e o registro dela.</a:t>
+            </a:r>
+            <a:endParaRPr lang="en-US" sz="1400" dirty="0"/>
+          </a:p>
+        </p:txBody>
+      </p:sp>
+      <p:sp>
+        <p:nvSpPr>
+          <p:cNvPr id="6" name="Text 3"/>
           <p:cNvSpPr txBox="1"/>
           <p:nvPr/>
         </p:nvSpPr>
@@ -6588,7 +6635,7 @@
       </p:sp>
       <p:sp>
         <p:nvSpPr>
-          <p:cNvPr id="6" name="Text 3"/>
+          <p:cNvPr id="7" name="Text 4"/>
           <p:cNvSpPr txBox="1"/>
           <p:nvPr/>
         </p:nvSpPr>
@@ -6635,7 +6682,7 @@
       </p:sp>
       <p:sp>
         <p:nvSpPr>
-          <p:cNvPr id="7" name="Text 4"/>
+          <p:cNvPr id="8" name="Text 5"/>
           <p:cNvSpPr txBox="1"/>
           <p:nvPr/>
         </p:nvSpPr>
@@ -6682,7 +6729,7 @@
       </p:sp>
       <p:sp>
         <p:nvSpPr>
-          <p:cNvPr id="8" name="Text 5"/>
+          <p:cNvPr id="9" name="Text 6"/>
           <p:cNvSpPr txBox="1"/>
           <p:nvPr/>
         </p:nvSpPr>
@@ -6732,7 +6779,7 @@
       </p:sp>
       <p:sp>
         <p:nvSpPr>
-          <p:cNvPr id="9" name="Text 6"/>
+          <p:cNvPr id="10" name="Text 7"/>
           <p:cNvSpPr txBox="1"/>
           <p:nvPr/>
         </p:nvSpPr>
@@ -6779,7 +6826,7 @@
       </p:sp>
       <p:sp>
         <p:nvSpPr>
-          <p:cNvPr id="10" name="Text 7"/>
+          <p:cNvPr id="11" name="Text 8"/>
           <p:cNvSpPr txBox="1"/>
           <p:nvPr/>
         </p:nvSpPr>
@@ -6826,7 +6873,7 @@
       </p:sp>
       <p:sp>
         <p:nvSpPr>
-          <p:cNvPr id="11" name="Text 8"/>
+          <p:cNvPr id="12" name="Text 9"/>
           <p:cNvSpPr txBox="1"/>
           <p:nvPr/>
         </p:nvSpPr>
@@ -6876,7 +6923,7 @@
       </p:sp>
       <p:sp>
         <p:nvSpPr>
-          <p:cNvPr id="12" name="Text 9"/>
+          <p:cNvPr id="13" name="Text 10"/>
           <p:cNvSpPr txBox="1"/>
           <p:nvPr/>
         </p:nvSpPr>
@@ -6923,7 +6970,7 @@
       </p:sp>
       <p:sp>
         <p:nvSpPr>
-          <p:cNvPr id="13" name="Text 10"/>
+          <p:cNvPr id="14" name="Text 11"/>
           <p:cNvSpPr txBox="1"/>
           <p:nvPr/>
         </p:nvSpPr>
@@ -6970,7 +7017,7 @@
       </p:sp>
       <p:sp>
         <p:nvSpPr>
-          <p:cNvPr id="14" name="Text 11"/>
+          <p:cNvPr id="15" name="Text 12"/>
           <p:cNvSpPr txBox="1"/>
           <p:nvPr/>
         </p:nvSpPr>
@@ -7020,7 +7067,7 @@
       </p:sp>
       <p:sp>
         <p:nvSpPr>
-          <p:cNvPr id="15" name="Text 12"/>
+          <p:cNvPr id="16" name="Text 13"/>
           <p:cNvSpPr txBox="1"/>
           <p:nvPr/>
         </p:nvSpPr>
@@ -7067,7 +7114,7 @@
       </p:sp>
       <p:sp>
         <p:nvSpPr>
-          <p:cNvPr id="16" name="Text 13"/>
+          <p:cNvPr id="17" name="Text 14"/>
           <p:cNvSpPr txBox="1"/>
           <p:nvPr/>
         </p:nvSpPr>

--- a/treinamento/oficina-nos-trilhos/1-slides-nos-trilhos.pptx
+++ b/treinamento/oficina-nos-trilhos/1-slides-nos-trilhos.pptx
@@ -147,14 +147,14 @@
   <p:extLst>
     <p:ext uri="{521415D9-36F7-43E2-AB2F-B90AF26B5E84}">
       <p14:sectionLst xmlns:p14="http://schemas.microsoft.com/office/powerpoint/2010/main">
-        <p14:section name="Abertura" id="{8791a8cd-6c94-e50e-034b-d25f262d9e53}">
+        <p14:section name="Abertura" id="{a3c71183-09ab-db9c-2bb9-c135ff214f23}">
           <p14:sldIdLst>
             <p14:sldId id="256"/>
             <p14:sldId id="257"/>
             <p14:sldId id="258"/>
           </p14:sldIdLst>
         </p14:section>
-        <p14:section name="1 · O trem e os trilhos" id="{aa0cb884-cec0-e8f9-3353-9b79572880ea}">
+        <p14:section name="1 · O trem e os trilhos" id="{5bed58e2-7539-950d-09af-011414b46f09}">
           <p14:sldIdLst>
             <p14:sldId id="259"/>
             <p14:sldId id="260"/>
@@ -169,7 +169,7 @@
             <p14:sldId id="269"/>
           </p14:sldIdLst>
         </p14:section>
-        <p14:section name="2 · O contrato" id="{920cd375-2b96-bed3-3a5f-a20d1aacee76}">
+        <p14:section name="2 · O contrato" id="{e0960e33-50f7-d219-2fc2-37a95420a114}">
           <p14:sldIdLst>
             <p14:sldId id="270"/>
             <p14:sldId id="271"/>
@@ -178,7 +178,7 @@
             <p14:sldId id="274"/>
           </p14:sldIdLst>
         </p14:section>
-        <p14:section name="3 · Os tipos de merge" id="{85ef5357-f991-1c3f-e7c1-030194bd3678}">
+        <p14:section name="3 · Os tipos de merge" id="{58a51b47-0d36-b2b2-0efc-c015b152e38f}">
           <p14:sldIdLst>
             <p14:sldId id="275"/>
             <p14:sldId id="276"/>
@@ -193,7 +193,7 @@
             <p14:sldId id="285"/>
           </p14:sldIdLst>
         </p14:section>
-        <p14:section name="4 · Versões e as regras do Modelo VIC" id="{0a01d10e-8cc7-a932-46f2-3a204188b7c8}">
+        <p14:section name="4 · Versões e as regras do Modelo VIC" id="{25c3758a-c9ce-f8eb-ceb3-2f9a29475e81}">
           <p14:sldIdLst>
             <p14:sldId id="286"/>
             <p14:sldId id="287"/>
@@ -204,7 +204,7 @@
             <p14:sldId id="292"/>
           </p14:sldIdLst>
         </p14:section>
-        <p14:section name="Fechamento" id="{7dbff8db-5163-c2f6-4c57-7e5ed93c75f4}">
+        <p14:section name="Fechamento" id="{2f969b45-369e-aaaf-0861-a81a6ff533d1}">
           <p14:sldIdLst>
             <p14:sldId id="293"/>
             <p14:sldId id="294"/>
@@ -704,7 +704,7 @@
           <a:p>
             <a:r>
               <a:rPr lang="en-US" dirty="0"/>
-              <a:t>Percorra a malha devagar. Em cima, a main: o trem comercial, com passageiros. Embaixo, a develop: o pátio, montando a próxima composição; o vagão tracejado é o lugar do que ainda está na oficina. Na feature, o vagão Cartões é construído e volta para o pátio. Quando a composição do pátio fica pronta, vai inteira para a vistoria, a release; aprovada, entra na linha comercial e também volta para o pátio. Quando um vagão do trem comercial dá defeito, ele vai para o desvio de emergência, o hotfix, e o conserto volta para o trem comercial e para o pátio.</a:t>
+              <a:t>Percorra a malha devagar. Em cima, a main: o trem comercial, com passageiros. Embaixo, a develop: o pátio, montando a próxima composição; o vagão tracejado é o lugar do que ainda está na oficina. Na feature, o vagão Cartões é construído e volta para o pátio, onde ocupa o lugar tracejado. Quando a composição do pátio fica pronta, vai inteira para a vistoria, a release, já com o Cartões; aprovada, entra na linha comercial e também volta para o pátio. Repare que o trem comercial ainda não tem o Cartões: ele só chega aos passageiros pela vistoria. Quando um vagão do trem comercial dá defeito, ele vai para o desvio de emergência, o hotfix, e o conserto volta para o trem comercial e para o pátio.</a:t>
             </a:r>
             <a:endParaRPr lang="en-US" dirty="0"/>
           </a:p>
@@ -6687,7 +6687,7 @@
         <p:spPr>
           <a:xfrm>
             <a:off x="868680" y="1188720"/>
-            <a:ext cx="10424160" cy="4738255"/>
+            <a:ext cx="10424160" cy="4493172"/>
           </a:xfrm>
           <a:prstGeom prst="rect">
             <a:avLst/>
